--- a/index/designs/y8-l14/l3-kitchen-measure-words/l3-kitchen-measure-words.pptx
+++ b/index/designs/y8-l14/l3-kitchen-measure-words/l3-kitchen-measure-words.pptx
@@ -7411,8 +7411,8 @@
         </p:nvSpPr>
         <p:spPr>
           <a:xfrm>
-            <a:off x="507950" y="180975"/>
-            <a:ext cx="1264837" cy="171450"/>
+            <a:off x="507950" y="176213"/>
+            <a:ext cx="1371404" cy="180975"/>
           </a:xfrm>
           <a:prstGeom prst="rect">
             <a:avLst/>
@@ -7450,8 +7450,8 @@
         </p:nvSpPr>
         <p:spPr>
           <a:xfrm>
-            <a:off x="2033439" y="166688"/>
-            <a:ext cx="934661" cy="200025"/>
+            <a:off x="2137916" y="166688"/>
+            <a:ext cx="1049426" cy="200025"/>
           </a:xfrm>
           <a:prstGeom prst="rect">
             <a:avLst/>
@@ -7489,8 +7489,8 @@
         </p:nvSpPr>
         <p:spPr>
           <a:xfrm>
-            <a:off x="11244709" y="180975"/>
-            <a:ext cx="448127" cy="171450"/>
+            <a:off x="11207800" y="176213"/>
+            <a:ext cx="485775" cy="180975"/>
           </a:xfrm>
           <a:prstGeom prst="rect">
             <a:avLst/>
@@ -9629,7 +9629,7 @@
       </p:sp>
       <p:pic>
         <p:nvPicPr>
-          <p:cNvPr id="10" name="Image 0" descr="/var/folders/6c/210dcgxn4gz5sm71vld2cy1h0000gn/T/tmp.emPkXuZ1Lq/img/shafa.png">    </p:cNvPr>
+          <p:cNvPr id="10" name="Image 0" descr="/var/folders/6c/210dcgxn4gz5sm71vld2cy1h0000gn/T/tmp.owmCEDjpXl/img/shafa.png">    </p:cNvPr>
           <p:cNvPicPr>
             <a:picLocks noChangeAspect="1"/>
           </p:cNvPicPr>
@@ -9728,7 +9728,7 @@
       </p:sp>
       <p:pic>
         <p:nvPicPr>
-          <p:cNvPr id="13" name="Image 1" descr="/var/folders/6c/210dcgxn4gz5sm71vld2cy1h0000gn/T/tmp.emPkXuZ1Lq/img/chaji.png">    </p:cNvPr>
+          <p:cNvPr id="13" name="Image 1" descr="/var/folders/6c/210dcgxn4gz5sm71vld2cy1h0000gn/T/tmp.owmCEDjpXl/img/chaji.png">    </p:cNvPr>
           <p:cNvPicPr>
             <a:picLocks noChangeAspect="1"/>
           </p:cNvPicPr>
@@ -9827,7 +9827,7 @@
       </p:sp>
       <p:pic>
         <p:nvPicPr>
-          <p:cNvPr id="16" name="Image 2" descr="/var/folders/6c/210dcgxn4gz5sm71vld2cy1h0000gn/T/tmp.emPkXuZ1Lq/img/dianshigui.png">    </p:cNvPr>
+          <p:cNvPr id="16" name="Image 2" descr="/var/folders/6c/210dcgxn4gz5sm71vld2cy1h0000gn/T/tmp.owmCEDjpXl/img/dianshigui.png">    </p:cNvPr>
           <p:cNvPicPr>
             <a:picLocks noChangeAspect="1"/>
           </p:cNvPicPr>
@@ -10001,7 +10001,7 @@
       </p:sp>
       <p:pic>
         <p:nvPicPr>
-          <p:cNvPr id="21" name="Image 3" descr="/var/folders/6c/210dcgxn4gz5sm71vld2cy1h0000gn/T/tmp.emPkXuZ1Lq/img/kongtiao.png">    </p:cNvPr>
+          <p:cNvPr id="21" name="Image 3" descr="/var/folders/6c/210dcgxn4gz5sm71vld2cy1h0000gn/T/tmp.owmCEDjpXl/img/kongtiao.png">    </p:cNvPr>
           <p:cNvPicPr>
             <a:picLocks noChangeAspect="1"/>
           </p:cNvPicPr>
@@ -10100,7 +10100,7 @@
       </p:sp>
       <p:pic>
         <p:nvPicPr>
-          <p:cNvPr id="24" name="Image 4" descr="/var/folders/6c/210dcgxn4gz5sm71vld2cy1h0000gn/T/tmp.emPkXuZ1Lq/img/xiyiji.png">    </p:cNvPr>
+          <p:cNvPr id="24" name="Image 4" descr="/var/folders/6c/210dcgxn4gz5sm71vld2cy1h0000gn/T/tmp.owmCEDjpXl/img/xiyiji.png">    </p:cNvPr>
           <p:cNvPicPr>
             <a:picLocks noChangeAspect="1"/>
           </p:cNvPicPr>
@@ -10199,7 +10199,7 @@
       </p:sp>
       <p:pic>
         <p:nvPicPr>
-          <p:cNvPr id="27" name="Image 5" descr="/var/folders/6c/210dcgxn4gz5sm71vld2cy1h0000gn/T/tmp.emPkXuZ1Lq/img/limian.png">    </p:cNvPr>
+          <p:cNvPr id="27" name="Image 5" descr="/var/folders/6c/210dcgxn4gz5sm71vld2cy1h0000gn/T/tmp.owmCEDjpXl/img/limian.png">    </p:cNvPr>
           <p:cNvPicPr>
             <a:picLocks noChangeAspect="1"/>
           </p:cNvPicPr>
@@ -10298,7 +10298,7 @@
       </p:sp>
       <p:pic>
         <p:nvPicPr>
-          <p:cNvPr id="30" name="Image 6" descr="/var/folders/6c/210dcgxn4gz5sm71vld2cy1h0000gn/T/tmp.emPkXuZ1Lq/img/bingxiang.png">    </p:cNvPr>
+          <p:cNvPr id="30" name="Image 6" descr="/var/folders/6c/210dcgxn4gz5sm71vld2cy1h0000gn/T/tmp.owmCEDjpXl/img/bingxiang.png">    </p:cNvPr>
           <p:cNvPicPr>
             <a:picLocks noChangeAspect="1"/>
           </p:cNvPicPr>
@@ -10397,7 +10397,7 @@
       </p:sp>
       <p:pic>
         <p:nvPicPr>
-          <p:cNvPr id="33" name="Image 7" descr="/var/folders/6c/210dcgxn4gz5sm71vld2cy1h0000gn/T/tmp.emPkXuZ1Lq/img/kaoxiang.png">    </p:cNvPr>
+          <p:cNvPr id="33" name="Image 7" descr="/var/folders/6c/210dcgxn4gz5sm71vld2cy1h0000gn/T/tmp.owmCEDjpXl/img/kaoxiang.png">    </p:cNvPr>
           <p:cNvPicPr>
             <a:picLocks noChangeAspect="1"/>
           </p:cNvPicPr>
@@ -10496,7 +10496,7 @@
       </p:sp>
       <p:pic>
         <p:nvPicPr>
-          <p:cNvPr id="36" name="Image 8" descr="/var/folders/6c/210dcgxn4gz5sm71vld2cy1h0000gn/T/tmp.emPkXuZ1Lq/img/dianlu.png">    </p:cNvPr>
+          <p:cNvPr id="36" name="Image 8" descr="/var/folders/6c/210dcgxn4gz5sm71vld2cy1h0000gn/T/tmp.owmCEDjpXl/img/dianlu.png">    </p:cNvPr>
           <p:cNvPicPr>
             <a:picLocks noChangeAspect="1"/>
           </p:cNvPicPr>
@@ -10875,7 +10875,7 @@
       </p:sp>
       <p:pic>
         <p:nvPicPr>
-          <p:cNvPr id="9" name="Image 0" descr="/var/folders/6c/210dcgxn4gz5sm71vld2cy1h0000gn/T/tmp.emPkXuZ1Lq/img/chufang.png">    </p:cNvPr>
+          <p:cNvPr id="9" name="Image 0" descr="/var/folders/6c/210dcgxn4gz5sm71vld2cy1h0000gn/T/tmp.owmCEDjpXl/img/chufang.png">    </p:cNvPr>
           <p:cNvPicPr>
             <a:picLocks noChangeAspect="1"/>
           </p:cNvPicPr>
@@ -12169,8 +12169,8 @@
         </p:nvSpPr>
         <p:spPr>
           <a:xfrm>
-            <a:off x="507950" y="180975"/>
-            <a:ext cx="2386370" cy="171450"/>
+            <a:off x="507950" y="176213"/>
+            <a:ext cx="2644893" cy="180975"/>
           </a:xfrm>
           <a:prstGeom prst="rect">
             <a:avLst/>
@@ -12208,8 +12208,8 @@
         </p:nvSpPr>
         <p:spPr>
           <a:xfrm>
-            <a:off x="3132981" y="166688"/>
-            <a:ext cx="1206392" cy="200025"/>
+            <a:off x="3386435" y="166688"/>
+            <a:ext cx="1296260" cy="200025"/>
           </a:xfrm>
           <a:prstGeom prst="rect">
             <a:avLst/>
@@ -12247,8 +12247,8 @@
         </p:nvSpPr>
         <p:spPr>
           <a:xfrm>
-            <a:off x="11244709" y="180975"/>
-            <a:ext cx="448127" cy="171450"/>
+            <a:off x="11183392" y="176213"/>
+            <a:ext cx="510671" cy="180975"/>
           </a:xfrm>
           <a:prstGeom prst="rect">
             <a:avLst/>
@@ -14503,8 +14503,8 @@
         </p:nvSpPr>
         <p:spPr>
           <a:xfrm>
-            <a:off x="507950" y="180975"/>
-            <a:ext cx="2386370" cy="171450"/>
+            <a:off x="507950" y="176213"/>
+            <a:ext cx="2644893" cy="180975"/>
           </a:xfrm>
           <a:prstGeom prst="rect">
             <a:avLst/>
@@ -14542,8 +14542,8 @@
         </p:nvSpPr>
         <p:spPr>
           <a:xfrm>
-            <a:off x="3132981" y="166688"/>
-            <a:ext cx="1934295" cy="200025"/>
+            <a:off x="3386435" y="166688"/>
+            <a:ext cx="2195703" cy="200025"/>
           </a:xfrm>
           <a:prstGeom prst="rect">
             <a:avLst/>
@@ -14581,8 +14581,8 @@
         </p:nvSpPr>
         <p:spPr>
           <a:xfrm>
-            <a:off x="11244709" y="180975"/>
-            <a:ext cx="448127" cy="171450"/>
+            <a:off x="11183094" y="176213"/>
+            <a:ext cx="510975" cy="180975"/>
           </a:xfrm>
           <a:prstGeom prst="rect">
             <a:avLst/>
@@ -14650,7 +14650,7 @@
         </p:nvSpPr>
         <p:spPr>
           <a:xfrm>
-            <a:off x="609600" y="2016026"/>
+            <a:off x="609600" y="2011263"/>
             <a:ext cx="11192256" cy="200025"/>
           </a:xfrm>
           <a:prstGeom prst="rect">
@@ -14689,7 +14689,7 @@
         </p:nvSpPr>
         <p:spPr>
           <a:xfrm>
-            <a:off x="609600" y="2216051"/>
+            <a:off x="609600" y="2211288"/>
             <a:ext cx="10972800" cy="1531590"/>
           </a:xfrm>
           <a:prstGeom prst="roundRect">
@@ -14725,7 +14725,7 @@
         </p:nvSpPr>
         <p:spPr>
           <a:xfrm>
-            <a:off x="933450" y="2463701"/>
+            <a:off x="933450" y="2458938"/>
             <a:ext cx="10531602" cy="345430"/>
           </a:xfrm>
           <a:prstGeom prst="rect">
@@ -14767,7 +14767,7 @@
         </p:nvSpPr>
         <p:spPr>
           <a:xfrm>
-            <a:off x="933450" y="2809131"/>
+            <a:off x="933450" y="2804368"/>
             <a:ext cx="10531602" cy="345430"/>
           </a:xfrm>
           <a:prstGeom prst="rect">
@@ -14853,7 +14853,7 @@
         </p:nvSpPr>
         <p:spPr>
           <a:xfrm>
-            <a:off x="933450" y="3154561"/>
+            <a:off x="933450" y="3149798"/>
             <a:ext cx="10531602" cy="345430"/>
           </a:xfrm>
           <a:prstGeom prst="rect">
@@ -14895,12 +14895,12 @@
         </p:nvSpPr>
         <p:spPr>
           <a:xfrm>
-            <a:off x="609600" y="3925342"/>
-            <a:ext cx="10972800" cy="941933"/>
+            <a:off x="609600" y="3920579"/>
+            <a:ext cx="10972800" cy="951458"/>
           </a:xfrm>
           <a:prstGeom prst="roundRect">
             <a:avLst>
-              <a:gd name="adj" fmla="val 6741"/>
+              <a:gd name="adj" fmla="val 6674"/>
             </a:avLst>
           </a:prstGeom>
           <a:solidFill>
@@ -14933,8 +14933,8 @@
         </p:nvSpPr>
         <p:spPr>
           <a:xfrm>
-            <a:off x="857250" y="4122093"/>
-            <a:ext cx="10687050" cy="190500"/>
+            <a:off x="857250" y="4117330"/>
+            <a:ext cx="10687050" cy="200025"/>
           </a:xfrm>
           <a:prstGeom prst="rect">
             <a:avLst/>
@@ -14975,7 +14975,7 @@
         </p:nvSpPr>
         <p:spPr>
           <a:xfrm>
-            <a:off x="857250" y="4375993"/>
+            <a:off x="857250" y="4380756"/>
             <a:ext cx="10687050" cy="294531"/>
           </a:xfrm>
           <a:prstGeom prst="rect">
@@ -19138,7 +19138,7 @@
       </p:sp>
       <p:pic>
         <p:nvPicPr>
-          <p:cNvPr id="10" name="Image 0" descr="/var/folders/6c/210dcgxn4gz5sm71vld2cy1h0000gn/T/tmp.emPkXuZ1Lq/img/bingxiang.png">    </p:cNvPr>
+          <p:cNvPr id="10" name="Image 0" descr="/var/folders/6c/210dcgxn4gz5sm71vld2cy1h0000gn/T/tmp.owmCEDjpXl/img/bingxiang.png">    </p:cNvPr>
           <p:cNvPicPr>
             <a:picLocks noChangeAspect="1"/>
           </p:cNvPicPr>
@@ -19318,7 +19318,7 @@
       </p:sp>
       <p:pic>
         <p:nvPicPr>
-          <p:cNvPr id="15" name="Image 1" descr="/var/folders/6c/210dcgxn4gz5sm71vld2cy1h0000gn/T/tmp.emPkXuZ1Lq/img/kaoxiang.png">    </p:cNvPr>
+          <p:cNvPr id="15" name="Image 1" descr="/var/folders/6c/210dcgxn4gz5sm71vld2cy1h0000gn/T/tmp.owmCEDjpXl/img/kaoxiang.png">    </p:cNvPr>
           <p:cNvPicPr>
             <a:picLocks noChangeAspect="1"/>
           </p:cNvPicPr>
@@ -19733,7 +19733,7 @@
       </p:sp>
       <p:pic>
         <p:nvPicPr>
-          <p:cNvPr id="9" name="Image 0" descr="/var/folders/6c/210dcgxn4gz5sm71vld2cy1h0000gn/T/tmp.emPkXuZ1Lq/img/bingxiang.png">    </p:cNvPr>
+          <p:cNvPr id="9" name="Image 0" descr="/var/folders/6c/210dcgxn4gz5sm71vld2cy1h0000gn/T/tmp.owmCEDjpXl/img/bingxiang.png">    </p:cNvPr>
           <p:cNvPicPr>
             <a:picLocks noChangeAspect="1"/>
           </p:cNvPicPr>
@@ -20900,8 +20900,8 @@
         </p:nvSpPr>
         <p:spPr>
           <a:xfrm>
-            <a:off x="507950" y="176213"/>
-            <a:ext cx="1371404" cy="180975"/>
+            <a:off x="507950" y="180975"/>
+            <a:ext cx="1264837" cy="171450"/>
           </a:xfrm>
           <a:prstGeom prst="rect">
             <a:avLst/>
@@ -20939,8 +20939,8 @@
         </p:nvSpPr>
         <p:spPr>
           <a:xfrm>
-            <a:off x="2137916" y="166688"/>
-            <a:ext cx="1785830" cy="200025"/>
+            <a:off x="2033439" y="166688"/>
+            <a:ext cx="1700364" cy="200025"/>
           </a:xfrm>
           <a:prstGeom prst="rect">
             <a:avLst/>
@@ -20978,8 +20978,8 @@
         </p:nvSpPr>
         <p:spPr>
           <a:xfrm>
-            <a:off x="11271349" y="176213"/>
-            <a:ext cx="420954" cy="180975"/>
+            <a:off x="11322397" y="180975"/>
+            <a:ext cx="368885" cy="171450"/>
           </a:xfrm>
           <a:prstGeom prst="rect">
             <a:avLst/>
@@ -21047,7 +21047,7 @@
         </p:nvSpPr>
         <p:spPr>
           <a:xfrm>
-            <a:off x="609600" y="1972568"/>
+            <a:off x="609600" y="1977330"/>
             <a:ext cx="11192256" cy="200025"/>
           </a:xfrm>
           <a:prstGeom prst="rect">
@@ -21086,7 +21086,7 @@
         </p:nvSpPr>
         <p:spPr>
           <a:xfrm>
-            <a:off x="609600" y="2172593"/>
+            <a:off x="609600" y="2177355"/>
             <a:ext cx="10972800" cy="1314450"/>
           </a:xfrm>
           <a:prstGeom prst="roundRect">
@@ -21122,7 +21122,7 @@
         </p:nvSpPr>
         <p:spPr>
           <a:xfrm>
-            <a:off x="958751" y="2496443"/>
+            <a:off x="958751" y="2501205"/>
             <a:ext cx="10479988" cy="666750"/>
           </a:xfrm>
           <a:prstGeom prst="rect">
@@ -21164,12 +21164,12 @@
         </p:nvSpPr>
         <p:spPr>
           <a:xfrm>
-            <a:off x="609600" y="3664744"/>
-            <a:ext cx="10972800" cy="1245989"/>
+            <a:off x="609600" y="3669506"/>
+            <a:ext cx="10972800" cy="1236464"/>
           </a:xfrm>
           <a:prstGeom prst="roundRect">
             <a:avLst>
-              <a:gd name="adj" fmla="val 5096"/>
+              <a:gd name="adj" fmla="val 5136"/>
             </a:avLst>
           </a:prstGeom>
           <a:solidFill>
@@ -21202,8 +21202,8 @@
         </p:nvSpPr>
         <p:spPr>
           <a:xfrm>
-            <a:off x="857250" y="3861495"/>
-            <a:ext cx="10687050" cy="200025"/>
+            <a:off x="857250" y="3866257"/>
+            <a:ext cx="10687050" cy="190500"/>
           </a:xfrm>
           <a:prstGeom prst="rect">
             <a:avLst/>
@@ -21244,7 +21244,7 @@
         </p:nvSpPr>
         <p:spPr>
           <a:xfrm>
-            <a:off x="857250" y="4124920"/>
+            <a:off x="857250" y="4120158"/>
             <a:ext cx="10687050" cy="589062"/>
           </a:xfrm>
           <a:prstGeom prst="rect">
@@ -21609,7 +21609,7 @@
       </p:sp>
       <p:pic>
         <p:nvPicPr>
-          <p:cNvPr id="10" name="Image 0" descr="/var/folders/6c/210dcgxn4gz5sm71vld2cy1h0000gn/T/tmp.emPkXuZ1Lq/img/dianlu.png">    </p:cNvPr>
+          <p:cNvPr id="10" name="Image 0" descr="/var/folders/6c/210dcgxn4gz5sm71vld2cy1h0000gn/T/tmp.owmCEDjpXl/img/dianlu.png">    </p:cNvPr>
           <p:cNvPicPr>
             <a:picLocks noChangeAspect="1"/>
           </p:cNvPicPr>
@@ -21844,8 +21844,8 @@
         </p:nvSpPr>
         <p:spPr>
           <a:xfrm>
-            <a:off x="507950" y="180975"/>
-            <a:ext cx="1264837" cy="171450"/>
+            <a:off x="507950" y="176213"/>
+            <a:ext cx="1371404" cy="180975"/>
           </a:xfrm>
           <a:prstGeom prst="rect">
             <a:avLst/>
@@ -21883,8 +21883,8 @@
         </p:nvSpPr>
         <p:spPr>
           <a:xfrm>
-            <a:off x="2033439" y="166688"/>
-            <a:ext cx="1520931" cy="200025"/>
+            <a:off x="2137916" y="166688"/>
+            <a:ext cx="1648295" cy="200025"/>
           </a:xfrm>
           <a:prstGeom prst="rect">
             <a:avLst/>
@@ -21922,8 +21922,8 @@
         </p:nvSpPr>
         <p:spPr>
           <a:xfrm>
-            <a:off x="11322397" y="180975"/>
-            <a:ext cx="368885" cy="171450"/>
+            <a:off x="11264652" y="176213"/>
+            <a:ext cx="427786" cy="180975"/>
           </a:xfrm>
           <a:prstGeom prst="rect">
             <a:avLst/>
@@ -21991,7 +21991,7 @@
         </p:nvSpPr>
         <p:spPr>
           <a:xfrm>
-            <a:off x="609600" y="1409551"/>
+            <a:off x="609600" y="1395264"/>
             <a:ext cx="11192256" cy="200025"/>
           </a:xfrm>
           <a:prstGeom prst="rect">
@@ -22030,8 +22030,8 @@
         </p:nvSpPr>
         <p:spPr>
           <a:xfrm>
-            <a:off x="609600" y="1685776"/>
-            <a:ext cx="10972800" cy="1042541"/>
+            <a:off x="609600" y="1671489"/>
+            <a:ext cx="10972800" cy="1052066"/>
           </a:xfrm>
           <a:prstGeom prst="rect">
             <a:avLst/>
@@ -22060,8 +22060,8 @@
         </p:nvSpPr>
         <p:spPr>
           <a:xfrm>
-            <a:off x="633412" y="1685776"/>
-            <a:ext cx="0" cy="1042541"/>
+            <a:off x="633412" y="1671489"/>
+            <a:ext cx="0" cy="1052066"/>
           </a:xfrm>
           <a:prstGeom prst="line">
             <a:avLst/>
@@ -22083,7 +22083,7 @@
         </p:nvSpPr>
         <p:spPr>
           <a:xfrm>
-            <a:off x="885825" y="1838176"/>
+            <a:off x="885825" y="1823889"/>
             <a:ext cx="10677335" cy="445740"/>
           </a:xfrm>
           <a:prstGeom prst="rect">
@@ -22147,8 +22147,8 @@
         </p:nvSpPr>
         <p:spPr>
           <a:xfrm>
-            <a:off x="885825" y="2347317"/>
-            <a:ext cx="10677335" cy="228600"/>
+            <a:off x="885825" y="2333030"/>
+            <a:ext cx="10677335" cy="238125"/>
           </a:xfrm>
           <a:prstGeom prst="rect">
             <a:avLst/>
@@ -22189,8 +22189,8 @@
         </p:nvSpPr>
         <p:spPr>
           <a:xfrm>
-            <a:off x="609600" y="2880717"/>
-            <a:ext cx="10972800" cy="1042541"/>
+            <a:off x="609600" y="2875955"/>
+            <a:ext cx="10972800" cy="1052066"/>
           </a:xfrm>
           <a:prstGeom prst="rect">
             <a:avLst/>
@@ -22219,8 +22219,8 @@
         </p:nvSpPr>
         <p:spPr>
           <a:xfrm>
-            <a:off x="633412" y="2880717"/>
-            <a:ext cx="0" cy="1042541"/>
+            <a:off x="633412" y="2875955"/>
+            <a:ext cx="0" cy="1052066"/>
           </a:xfrm>
           <a:prstGeom prst="line">
             <a:avLst/>
@@ -22242,7 +22242,7 @@
         </p:nvSpPr>
         <p:spPr>
           <a:xfrm>
-            <a:off x="885825" y="3033117"/>
+            <a:off x="885825" y="3028355"/>
             <a:ext cx="10677335" cy="445740"/>
           </a:xfrm>
           <a:prstGeom prst="rect">
@@ -22306,8 +22306,8 @@
         </p:nvSpPr>
         <p:spPr>
           <a:xfrm>
-            <a:off x="885825" y="3542258"/>
-            <a:ext cx="10677335" cy="228600"/>
+            <a:off x="885825" y="3537496"/>
+            <a:ext cx="10677335" cy="238125"/>
           </a:xfrm>
           <a:prstGeom prst="rect">
             <a:avLst/>
@@ -22348,8 +22348,8 @@
         </p:nvSpPr>
         <p:spPr>
           <a:xfrm>
-            <a:off x="609600" y="4075658"/>
-            <a:ext cx="10972800" cy="1042541"/>
+            <a:off x="609600" y="4080421"/>
+            <a:ext cx="10972800" cy="1052066"/>
           </a:xfrm>
           <a:prstGeom prst="rect">
             <a:avLst/>
@@ -22380,8 +22380,8 @@
         </p:nvSpPr>
         <p:spPr>
           <a:xfrm>
-            <a:off x="633412" y="4075658"/>
-            <a:ext cx="0" cy="1042541"/>
+            <a:off x="633412" y="4080421"/>
+            <a:ext cx="0" cy="1052066"/>
           </a:xfrm>
           <a:prstGeom prst="line">
             <a:avLst/>
@@ -22403,7 +22403,7 @@
         </p:nvSpPr>
         <p:spPr>
           <a:xfrm>
-            <a:off x="885825" y="4228058"/>
+            <a:off x="885825" y="4232821"/>
             <a:ext cx="10677335" cy="445740"/>
           </a:xfrm>
           <a:prstGeom prst="rect">
@@ -22467,8 +22467,8 @@
         </p:nvSpPr>
         <p:spPr>
           <a:xfrm>
-            <a:off x="885825" y="4737199"/>
-            <a:ext cx="10677335" cy="228600"/>
+            <a:off x="885825" y="4741962"/>
+            <a:ext cx="10677335" cy="238125"/>
           </a:xfrm>
           <a:prstGeom prst="rect">
             <a:avLst/>
@@ -22509,7 +22509,7 @@
         </p:nvSpPr>
         <p:spPr>
           <a:xfrm>
-            <a:off x="609600" y="5245150"/>
+            <a:off x="609600" y="5259437"/>
             <a:ext cx="11192256" cy="228600"/>
           </a:xfrm>
           <a:prstGeom prst="rect">
